--- a/ModularizingTheMonolith/ModularizingTheMonolith.pptx
+++ b/ModularizingTheMonolith/ModularizingTheMonolith.pptx
@@ -294,7 +294,7 @@
           <a:p>
             <a:fld id="{D4DDA21E-28F9-429C-875C-CFE3ACB8D770}" type="datetimeFigureOut">
               <a:rPr lang="en-US" smtClean="0"/>
-              <a:t>1/17/25</a:t>
+              <a:t>8/15/25</a:t>
             </a:fld>
             <a:endParaRPr lang="en-US"/>
           </a:p>
@@ -1053,7 +1053,7 @@
             <a:spLocks noGrp="1"/>
           </p:cNvSpPr>
           <p:nvPr>
-            <p:ph type="sldNum" sz="quarter" idx="10"/>
+            <p:ph type="sldNum" sz="quarter" idx="5"/>
           </p:nvPr>
         </p:nvSpPr>
         <p:spPr/>
@@ -1063,7 +1063,7 @@
           <a:p>
             <a:fld id="{DC42B9C4-3265-4C64-80EB-D0107FD08979}" type="slidenum">
               <a:rPr lang="en-US" smtClean="0"/>
-              <a:t>61</a:t>
+              <a:t>48</a:t>
             </a:fld>
             <a:endParaRPr lang="en-US"/>
           </a:p>
@@ -1072,7 +1072,7 @@
     </p:spTree>
     <p:extLst>
       <p:ext uri="{BB962C8B-B14F-4D97-AF65-F5344CB8AC3E}">
-        <p14:creationId xmlns:p14="http://schemas.microsoft.com/office/powerpoint/2010/main" val="1690203675"/>
+        <p14:creationId xmlns:p14="http://schemas.microsoft.com/office/powerpoint/2010/main" val="3356403232"/>
       </p:ext>
     </p:extLst>
   </p:cSld>
@@ -1126,6 +1126,90 @@
           <a:bodyPr/>
           <a:lstStyle/>
           <a:p>
+            <a:endParaRPr lang="en-US" dirty="0"/>
+          </a:p>
+        </p:txBody>
+      </p:sp>
+      <p:sp>
+        <p:nvSpPr>
+          <p:cNvPr id="4" name="Slide Number Placeholder 3"/>
+          <p:cNvSpPr>
+            <a:spLocks noGrp="1"/>
+          </p:cNvSpPr>
+          <p:nvPr>
+            <p:ph type="sldNum" sz="quarter" idx="10"/>
+          </p:nvPr>
+        </p:nvSpPr>
+        <p:spPr/>
+        <p:txBody>
+          <a:bodyPr/>
+          <a:lstStyle/>
+          <a:p>
+            <a:fld id="{DC42B9C4-3265-4C64-80EB-D0107FD08979}" type="slidenum">
+              <a:rPr lang="en-US" smtClean="0"/>
+              <a:t>61</a:t>
+            </a:fld>
+            <a:endParaRPr lang="en-US"/>
+          </a:p>
+        </p:txBody>
+      </p:sp>
+    </p:spTree>
+    <p:extLst>
+      <p:ext uri="{BB962C8B-B14F-4D97-AF65-F5344CB8AC3E}">
+        <p14:creationId xmlns:p14="http://schemas.microsoft.com/office/powerpoint/2010/main" val="1690203675"/>
+      </p:ext>
+    </p:extLst>
+  </p:cSld>
+  <p:clrMapOvr>
+    <a:masterClrMapping/>
+  </p:clrMapOvr>
+</p:notes>
+</file>
+
+<file path=ppt/notesSlides/notesSlide8.xml><?xml version="1.0" encoding="utf-8"?>
+<p:notes xmlns:a="http://schemas.openxmlformats.org/drawingml/2006/main" xmlns:r="http://schemas.openxmlformats.org/officeDocument/2006/relationships" xmlns:p="http://schemas.openxmlformats.org/presentationml/2006/main">
+  <p:cSld>
+    <p:spTree>
+      <p:nvGrpSpPr>
+        <p:cNvPr id="1" name=""/>
+        <p:cNvGrpSpPr/>
+        <p:nvPr/>
+      </p:nvGrpSpPr>
+      <p:grpSpPr>
+        <a:xfrm>
+          <a:off x="0" y="0"/>
+          <a:ext cx="0" cy="0"/>
+          <a:chOff x="0" y="0"/>
+          <a:chExt cx="0" cy="0"/>
+        </a:xfrm>
+      </p:grpSpPr>
+      <p:sp>
+        <p:nvSpPr>
+          <p:cNvPr id="2" name="Slide Image Placeholder 1"/>
+          <p:cNvSpPr>
+            <a:spLocks noGrp="1" noRot="1" noChangeAspect="1"/>
+          </p:cNvSpPr>
+          <p:nvPr>
+            <p:ph type="sldImg"/>
+          </p:nvPr>
+        </p:nvSpPr>
+        <p:spPr/>
+      </p:sp>
+      <p:sp>
+        <p:nvSpPr>
+          <p:cNvPr id="3" name="Notes Placeholder 2"/>
+          <p:cNvSpPr>
+            <a:spLocks noGrp="1"/>
+          </p:cNvSpPr>
+          <p:nvPr>
+            <p:ph type="body" idx="1"/>
+          </p:nvPr>
+        </p:nvSpPr>
+        <p:spPr/>
+        <p:txBody>
+          <a:bodyPr/>
+          <a:lstStyle/>
+          <a:p>
             <a:r>
               <a:rPr lang="en-US" dirty="0"/>
               <a:t>Dual-write</a:t>
@@ -1190,7 +1274,7 @@
 </p:notes>
 </file>
 
-<file path=ppt/notesSlides/notesSlide8.xml><?xml version="1.0" encoding="utf-8"?>
+<file path=ppt/notesSlides/notesSlide9.xml><?xml version="1.0" encoding="utf-8"?>
 <p:notes xmlns:a="http://schemas.openxmlformats.org/drawingml/2006/main" xmlns:r="http://schemas.openxmlformats.org/officeDocument/2006/relationships" xmlns:p="http://schemas.openxmlformats.org/presentationml/2006/main">
   <p:cSld>
     <p:spTree>
@@ -1410,7 +1494,7 @@
           <a:p>
             <a:fld id="{EB044DB1-568E-4964-A02F-CCDCEAA70EF3}" type="datetimeFigureOut">
               <a:rPr lang="en-US" smtClean="0"/>
-              <a:t>1/17/25</a:t>
+              <a:t>8/15/25</a:t>
             </a:fld>
             <a:endParaRPr lang="en-US"/>
           </a:p>
@@ -1715,7 +1799,7 @@
           <a:p>
             <a:fld id="{EB044DB1-568E-4964-A02F-CCDCEAA70EF3}" type="datetimeFigureOut">
               <a:rPr lang="en-US" smtClean="0"/>
-              <a:t>1/17/25</a:t>
+              <a:t>8/15/25</a:t>
             </a:fld>
             <a:endParaRPr lang="en-US"/>
           </a:p>
@@ -1880,7 +1964,7 @@
           <a:p>
             <a:fld id="{EB044DB1-568E-4964-A02F-CCDCEAA70EF3}" type="datetimeFigureOut">
               <a:rPr lang="en-US" smtClean="0"/>
-              <a:t>1/17/25</a:t>
+              <a:t>8/15/25</a:t>
             </a:fld>
             <a:endParaRPr lang="en-US"/>
           </a:p>
@@ -2055,7 +2139,7 @@
           <a:p>
             <a:fld id="{EB044DB1-568E-4964-A02F-CCDCEAA70EF3}" type="datetimeFigureOut">
               <a:rPr lang="en-US" smtClean="0"/>
-              <a:t>1/17/25</a:t>
+              <a:t>8/15/25</a:t>
             </a:fld>
             <a:endParaRPr lang="en-US"/>
           </a:p>
@@ -2456,7 +2540,7 @@
         <p:spPr>
           <a:xfrm>
             <a:off x="838200" y="6391922"/>
-            <a:ext cx="1332390" cy="307777"/>
+            <a:ext cx="3176588" cy="307777"/>
           </a:xfrm>
           <a:prstGeom prst="rect">
             <a:avLst/>
@@ -2487,7 +2571,7 @@
                   </a:schemeClr>
                 </a:solidFill>
               </a:rPr>
-              <a:t>jbogard</a:t>
+              <a:t>jimmybogard.com</a:t>
             </a:r>
             <a:endParaRPr lang="en-US" sz="1400" dirty="0">
               <a:solidFill>
@@ -2689,8 +2773,8 @@
         </p:nvSpPr>
         <p:spPr>
           <a:xfrm>
-            <a:off x="838200" y="6391922"/>
-            <a:ext cx="1332390" cy="307777"/>
+            <a:off x="838199" y="6391922"/>
+            <a:ext cx="2233613" cy="307777"/>
           </a:xfrm>
           <a:prstGeom prst="rect">
             <a:avLst/>
@@ -2721,7 +2805,7 @@
                   </a:schemeClr>
                 </a:solidFill>
               </a:rPr>
-              <a:t>jbogard</a:t>
+              <a:t>jimmybogard.com</a:t>
             </a:r>
             <a:endParaRPr lang="en-US" sz="1400" dirty="0">
               <a:solidFill>
@@ -2910,7 +2994,7 @@
         <p:spPr>
           <a:xfrm>
             <a:off x="838200" y="6391922"/>
-            <a:ext cx="1332390" cy="307777"/>
+            <a:ext cx="2033588" cy="307777"/>
           </a:xfrm>
           <a:prstGeom prst="rect">
             <a:avLst/>
@@ -2941,7 +3025,7 @@
                   </a:schemeClr>
                 </a:solidFill>
               </a:rPr>
-              <a:t>jbogard</a:t>
+              <a:t>jimmybogard.com</a:t>
             </a:r>
             <a:endParaRPr lang="en-US" sz="1400" dirty="0">
               <a:solidFill>
@@ -3264,8 +3348,8 @@
         </p:nvSpPr>
         <p:spPr>
           <a:xfrm>
-            <a:off x="838200" y="6391922"/>
-            <a:ext cx="1332390" cy="307777"/>
+            <a:off x="838199" y="6391922"/>
+            <a:ext cx="2905125" cy="307777"/>
           </a:xfrm>
           <a:prstGeom prst="rect">
             <a:avLst/>
@@ -3296,7 +3380,7 @@
                   </a:schemeClr>
                 </a:solidFill>
               </a:rPr>
-              <a:t>jbogard</a:t>
+              <a:t>jimmybogard.com</a:t>
             </a:r>
             <a:endParaRPr lang="en-US" sz="1400" dirty="0">
               <a:solidFill>
@@ -3371,7 +3455,7 @@
         <p:spPr>
           <a:xfrm>
             <a:off x="838200" y="6391922"/>
-            <a:ext cx="1332390" cy="307777"/>
+            <a:ext cx="2605088" cy="307777"/>
           </a:xfrm>
           <a:prstGeom prst="rect">
             <a:avLst/>
@@ -3402,7 +3486,7 @@
                   </a:schemeClr>
                 </a:solidFill>
               </a:rPr>
-              <a:t>jbogard</a:t>
+              <a:t>jimmybogard.com</a:t>
             </a:r>
             <a:endParaRPr lang="en-US" sz="1400" dirty="0">
               <a:solidFill>
@@ -3453,8 +3537,8 @@
         </p:nvSpPr>
         <p:spPr>
           <a:xfrm>
-            <a:off x="838200" y="6391922"/>
-            <a:ext cx="1332390" cy="307777"/>
+            <a:off x="838199" y="6391922"/>
+            <a:ext cx="3362325" cy="307777"/>
           </a:xfrm>
           <a:prstGeom prst="rect">
             <a:avLst/>
@@ -3485,7 +3569,7 @@
                   </a:schemeClr>
                 </a:solidFill>
               </a:rPr>
-              <a:t>jbogard</a:t>
+              <a:t>jimmybogard.com</a:t>
             </a:r>
             <a:endParaRPr lang="en-US" sz="1400" dirty="0">
               <a:solidFill>
@@ -3751,7 +3835,7 @@
           <a:p>
             <a:fld id="{EB044DB1-568E-4964-A02F-CCDCEAA70EF3}" type="datetimeFigureOut">
               <a:rPr lang="en-US" smtClean="0"/>
-              <a:t>1/17/25</a:t>
+              <a:t>8/15/25</a:t>
             </a:fld>
             <a:endParaRPr lang="en-US"/>
           </a:p>
@@ -3958,7 +4042,7 @@
           <a:p>
             <a:fld id="{EB044DB1-568E-4964-A02F-CCDCEAA70EF3}" type="datetimeFigureOut">
               <a:rPr lang="en-US" smtClean="0"/>
-              <a:t>1/17/25</a:t>
+              <a:t>8/15/25</a:t>
             </a:fld>
             <a:endParaRPr lang="en-US"/>
           </a:p>
@@ -4445,7 +4529,7 @@
             </a:r>
             <a:r>
               <a:rPr lang="en-US" dirty="0" err="1"/>
-              <a:t>jbogard</a:t>
+              <a:t>jimmybogard.com</a:t>
             </a:r>
             <a:endParaRPr lang="en-US" dirty="0"/>
           </a:p>
@@ -4471,7 +4555,7 @@
       </p:sp>
       <p:pic>
         <p:nvPicPr>
-          <p:cNvPr id="9" name="Picture 4" descr="https://mvp.support.microsoft.com/library/images/support/en-US/MVPLogo.gif"/>
+          <p:cNvPr id="12" name="Picture 12" descr="AutoMapper"/>
           <p:cNvPicPr>
             <a:picLocks noChangeAspect="1" noChangeArrowheads="1"/>
           </p:cNvPicPr>
@@ -4492,8 +4576,8 @@
         </p:blipFill>
         <p:spPr bwMode="auto">
           <a:xfrm>
-            <a:off x="3230080" y="4637554"/>
-            <a:ext cx="1095375" cy="1714500"/>
+            <a:off x="5608299" y="4809973"/>
+            <a:ext cx="3733800" cy="382377"/>
           </a:xfrm>
           <a:prstGeom prst="rect">
             <a:avLst/>
@@ -4512,63 +4596,58 @@
       </p:pic>
       <p:pic>
         <p:nvPicPr>
-          <p:cNvPr id="12" name="Picture 12" descr="AutoMapper"/>
+          <p:cNvPr id="4" name="Picture 3"/>
           <p:cNvPicPr>
-            <a:picLocks noChangeAspect="1" noChangeArrowheads="1"/>
+            <a:picLocks noChangeAspect="1"/>
           </p:cNvPicPr>
           <p:nvPr/>
         </p:nvPicPr>
         <p:blipFill>
-          <a:blip r:embed="rId7">
-            <a:extLst>
-              <a:ext uri="{28A0092B-C50C-407E-A947-70E740481C1C}">
-                <a14:useLocalDpi xmlns:a14="http://schemas.microsoft.com/office/drawing/2010/main" val="0"/>
-              </a:ext>
-            </a:extLst>
-          </a:blip>
-          <a:srcRect/>
+          <a:blip r:embed="rId7"/>
           <a:stretch>
             <a:fillRect/>
           </a:stretch>
         </p:blipFill>
-        <p:spPr bwMode="auto">
-          <a:xfrm>
-            <a:off x="5608299" y="4809973"/>
-            <a:ext cx="3733800" cy="382377"/>
+        <p:spPr>
+          <a:xfrm>
+            <a:off x="6949172" y="5420546"/>
+            <a:ext cx="1052054" cy="1052054"/>
           </a:xfrm>
           <a:prstGeom prst="rect">
             <a:avLst/>
           </a:prstGeom>
-          <a:noFill/>
-          <a:extLst>
-            <a:ext uri="{909E8E84-426E-40DD-AFC4-6F175D3DCCD1}">
-              <a14:hiddenFill xmlns:a14="http://schemas.microsoft.com/office/drawing/2010/main">
-                <a:solidFill>
-                  <a:srgbClr val="FFFFFF"/>
-                </a:solidFill>
-              </a14:hiddenFill>
-            </a:ext>
-          </a:extLst>
         </p:spPr>
       </p:pic>
       <p:pic>
         <p:nvPicPr>
-          <p:cNvPr id="4" name="Picture 3"/>
+          <p:cNvPr id="5" name="Picture 4">
+            <a:extLst>
+              <a:ext uri="{FF2B5EF4-FFF2-40B4-BE49-F238E27FC236}">
+                <a16:creationId xmlns:a16="http://schemas.microsoft.com/office/drawing/2014/main" id="{1EF15090-8880-645B-BF36-AA6FB103E880}"/>
+              </a:ext>
+            </a:extLst>
+          </p:cNvPr>
           <p:cNvPicPr>
             <a:picLocks noChangeAspect="1"/>
           </p:cNvPicPr>
           <p:nvPr/>
         </p:nvPicPr>
         <p:blipFill>
-          <a:blip r:embed="rId8"/>
+          <a:blip r:embed="rId8">
+            <a:extLst>
+              <a:ext uri="{28A0092B-C50C-407E-A947-70E740481C1C}">
+                <a14:useLocalDpi xmlns:a14="http://schemas.microsoft.com/office/drawing/2010/main" val="0"/>
+              </a:ext>
+            </a:extLst>
+          </a:blip>
           <a:stretch>
             <a:fillRect/>
           </a:stretch>
         </p:blipFill>
         <p:spPr>
           <a:xfrm>
-            <a:off x="6949172" y="5420546"/>
-            <a:ext cx="1052054" cy="1052054"/>
+            <a:off x="3223042" y="4908445"/>
+            <a:ext cx="914400" cy="1447800"/>
           </a:xfrm>
           <a:prstGeom prst="rect">
             <a:avLst/>
@@ -7121,8 +7200,12 @@
           </a:lstStyle>
           <a:p>
             <a:r>
-              <a:rPr lang="en-US"/>
-              <a:t>@jbogard</a:t>
+              <a:rPr lang="en-US" dirty="0"/>
+              <a:t>@</a:t>
+            </a:r>
+            <a:r>
+              <a:rPr lang="en-US" dirty="0" err="1"/>
+              <a:t>jimmybogard.com</a:t>
             </a:r>
             <a:endParaRPr lang="en-US" dirty="0"/>
           </a:p>
@@ -15858,139 +15941,6 @@
       </p:sp>
       <p:sp>
         <p:nvSpPr>
-          <p:cNvPr id="4" name="Date Placeholder 3">
-            <a:extLst>
-              <a:ext uri="{FF2B5EF4-FFF2-40B4-BE49-F238E27FC236}">
-                <a16:creationId xmlns:a16="http://schemas.microsoft.com/office/drawing/2014/main" id="{4771EABF-51C0-435F-8AD1-058BAFF4FC74}"/>
-              </a:ext>
-            </a:extLst>
-          </p:cNvPr>
-          <p:cNvSpPr>
-            <a:spLocks noGrp="1"/>
-          </p:cNvSpPr>
-          <p:nvPr>
-            <p:ph type="dt" sz="half" idx="10"/>
-          </p:nvPr>
-        </p:nvSpPr>
-        <p:spPr>
-          <a:xfrm>
-            <a:off x="838200" y="6356350"/>
-            <a:ext cx="2743200" cy="365125"/>
-          </a:xfrm>
-          <a:prstGeom prst="rect">
-            <a:avLst/>
-          </a:prstGeom>
-        </p:spPr>
-        <p:txBody>
-          <a:bodyPr vert="horz" lIns="91440" tIns="45720" rIns="91440" bIns="45720" rtlCol="0" anchor="ctr"/>
-          <a:lstStyle>
-            <a:defPPr>
-              <a:defRPr lang="en-US"/>
-            </a:defPPr>
-            <a:lvl1pPr marL="0" algn="l" defTabSz="914400" rtl="0" eaLnBrk="1" latinLnBrk="0" hangingPunct="1">
-              <a:defRPr sz="1200" kern="1200">
-                <a:solidFill>
-                  <a:schemeClr val="tx1">
-                    <a:tint val="75000"/>
-                  </a:schemeClr>
-                </a:solidFill>
-                <a:latin typeface="+mn-lt"/>
-                <a:ea typeface="+mn-ea"/>
-                <a:cs typeface="+mn-cs"/>
-              </a:defRPr>
-            </a:lvl1pPr>
-            <a:lvl2pPr marL="457200" algn="l" defTabSz="914400" rtl="0" eaLnBrk="1" latinLnBrk="0" hangingPunct="1">
-              <a:defRPr sz="1800" kern="1200">
-                <a:solidFill>
-                  <a:schemeClr val="tx1"/>
-                </a:solidFill>
-                <a:latin typeface="+mn-lt"/>
-                <a:ea typeface="+mn-ea"/>
-                <a:cs typeface="+mn-cs"/>
-              </a:defRPr>
-            </a:lvl2pPr>
-            <a:lvl3pPr marL="914400" algn="l" defTabSz="914400" rtl="0" eaLnBrk="1" latinLnBrk="0" hangingPunct="1">
-              <a:defRPr sz="1800" kern="1200">
-                <a:solidFill>
-                  <a:schemeClr val="tx1"/>
-                </a:solidFill>
-                <a:latin typeface="+mn-lt"/>
-                <a:ea typeface="+mn-ea"/>
-                <a:cs typeface="+mn-cs"/>
-              </a:defRPr>
-            </a:lvl3pPr>
-            <a:lvl4pPr marL="1371600" algn="l" defTabSz="914400" rtl="0" eaLnBrk="1" latinLnBrk="0" hangingPunct="1">
-              <a:defRPr sz="1800" kern="1200">
-                <a:solidFill>
-                  <a:schemeClr val="tx1"/>
-                </a:solidFill>
-                <a:latin typeface="+mn-lt"/>
-                <a:ea typeface="+mn-ea"/>
-                <a:cs typeface="+mn-cs"/>
-              </a:defRPr>
-            </a:lvl4pPr>
-            <a:lvl5pPr marL="1828800" algn="l" defTabSz="914400" rtl="0" eaLnBrk="1" latinLnBrk="0" hangingPunct="1">
-              <a:defRPr sz="1800" kern="1200">
-                <a:solidFill>
-                  <a:schemeClr val="tx1"/>
-                </a:solidFill>
-                <a:latin typeface="+mn-lt"/>
-                <a:ea typeface="+mn-ea"/>
-                <a:cs typeface="+mn-cs"/>
-              </a:defRPr>
-            </a:lvl5pPr>
-            <a:lvl6pPr marL="2286000" algn="l" defTabSz="914400" rtl="0" eaLnBrk="1" latinLnBrk="0" hangingPunct="1">
-              <a:defRPr sz="1800" kern="1200">
-                <a:solidFill>
-                  <a:schemeClr val="tx1"/>
-                </a:solidFill>
-                <a:latin typeface="+mn-lt"/>
-                <a:ea typeface="+mn-ea"/>
-                <a:cs typeface="+mn-cs"/>
-              </a:defRPr>
-            </a:lvl6pPr>
-            <a:lvl7pPr marL="2743200" algn="l" defTabSz="914400" rtl="0" eaLnBrk="1" latinLnBrk="0" hangingPunct="1">
-              <a:defRPr sz="1800" kern="1200">
-                <a:solidFill>
-                  <a:schemeClr val="tx1"/>
-                </a:solidFill>
-                <a:latin typeface="+mn-lt"/>
-                <a:ea typeface="+mn-ea"/>
-                <a:cs typeface="+mn-cs"/>
-              </a:defRPr>
-            </a:lvl7pPr>
-            <a:lvl8pPr marL="3200400" algn="l" defTabSz="914400" rtl="0" eaLnBrk="1" latinLnBrk="0" hangingPunct="1">
-              <a:defRPr sz="1800" kern="1200">
-                <a:solidFill>
-                  <a:schemeClr val="tx1"/>
-                </a:solidFill>
-                <a:latin typeface="+mn-lt"/>
-                <a:ea typeface="+mn-ea"/>
-                <a:cs typeface="+mn-cs"/>
-              </a:defRPr>
-            </a:lvl8pPr>
-            <a:lvl9pPr marL="3657600" algn="l" defTabSz="914400" rtl="0" eaLnBrk="1" latinLnBrk="0" hangingPunct="1">
-              <a:defRPr sz="1800" kern="1200">
-                <a:solidFill>
-                  <a:schemeClr val="tx1"/>
-                </a:solidFill>
-                <a:latin typeface="+mn-lt"/>
-                <a:ea typeface="+mn-ea"/>
-                <a:cs typeface="+mn-cs"/>
-              </a:defRPr>
-            </a:lvl9pPr>
-          </a:lstStyle>
-          <a:p>
-            <a:r>
-              <a:rPr lang="en-US"/>
-              <a:t>@jbogard</a:t>
-            </a:r>
-            <a:endParaRPr lang="en-US" dirty="0"/>
-          </a:p>
-        </p:txBody>
-      </p:sp>
-      <p:sp>
-        <p:nvSpPr>
           <p:cNvPr id="10" name="Rectangle 9">
             <a:extLst>
               <a:ext uri="{FF2B5EF4-FFF2-40B4-BE49-F238E27FC236}">
@@ -16777,8 +16727,12 @@
           </a:lstStyle>
           <a:p>
             <a:r>
-              <a:rPr lang="en-US"/>
-              <a:t>@jbogard</a:t>
+              <a:rPr lang="en-US" dirty="0"/>
+              <a:t>@</a:t>
+            </a:r>
+            <a:r>
+              <a:rPr lang="en-US" dirty="0" err="1"/>
+              <a:t>jimmybogard.com</a:t>
             </a:r>
             <a:endParaRPr lang="en-US" dirty="0"/>
           </a:p>
@@ -18191,8 +18145,12 @@
           </a:lstStyle>
           <a:p>
             <a:r>
-              <a:rPr lang="en-US"/>
-              <a:t>@jbogard</a:t>
+              <a:rPr lang="en-US" dirty="0"/>
+              <a:t>@</a:t>
+            </a:r>
+            <a:r>
+              <a:rPr lang="en-US" dirty="0" err="1"/>
+              <a:t>jimmybogard.com</a:t>
             </a:r>
             <a:endParaRPr lang="en-US" dirty="0"/>
           </a:p>
@@ -19289,8 +19247,12 @@
           </a:lstStyle>
           <a:p>
             <a:r>
-              <a:rPr lang="en-US"/>
-              <a:t>@jbogard</a:t>
+              <a:rPr lang="en-US" dirty="0"/>
+              <a:t>@</a:t>
+            </a:r>
+            <a:r>
+              <a:rPr lang="en-US" dirty="0" err="1"/>
+              <a:t>jimmybogard.com</a:t>
             </a:r>
             <a:endParaRPr lang="en-US" dirty="0"/>
           </a:p>
@@ -19946,8 +19908,12 @@
           </a:lstStyle>
           <a:p>
             <a:r>
-              <a:rPr lang="en-US"/>
-              <a:t>@jbogard</a:t>
+              <a:rPr lang="en-US" dirty="0"/>
+              <a:t>@</a:t>
+            </a:r>
+            <a:r>
+              <a:rPr lang="en-US" dirty="0" err="1"/>
+              <a:t>jimmybogard.com</a:t>
             </a:r>
             <a:endParaRPr lang="en-US" dirty="0"/>
           </a:p>
@@ -21344,8 +21310,12 @@
           </a:lstStyle>
           <a:p>
             <a:r>
-              <a:rPr lang="en-US"/>
-              <a:t>@jbogard</a:t>
+              <a:rPr lang="en-US" dirty="0"/>
+              <a:t>@</a:t>
+            </a:r>
+            <a:r>
+              <a:rPr lang="en-US" dirty="0" err="1"/>
+              <a:t>jimmybogard.com</a:t>
             </a:r>
             <a:endParaRPr lang="en-US" dirty="0"/>
           </a:p>
@@ -21565,8 +21535,12 @@
           </a:lstStyle>
           <a:p>
             <a:r>
-              <a:rPr lang="en-US"/>
-              <a:t>@jbogard</a:t>
+              <a:rPr lang="en-US" dirty="0"/>
+              <a:t>@</a:t>
+            </a:r>
+            <a:r>
+              <a:rPr lang="en-US" dirty="0" err="1"/>
+              <a:t>jimmybogard.com</a:t>
             </a:r>
             <a:endParaRPr lang="en-US" dirty="0"/>
           </a:p>
@@ -21786,8 +21760,12 @@
           </a:lstStyle>
           <a:p>
             <a:r>
-              <a:rPr lang="en-US"/>
-              <a:t>@jbogard</a:t>
+              <a:rPr lang="en-US" dirty="0"/>
+              <a:t>@</a:t>
+            </a:r>
+            <a:r>
+              <a:rPr lang="en-US" dirty="0" err="1"/>
+              <a:t>jimmybogard.com</a:t>
             </a:r>
             <a:endParaRPr lang="en-US" dirty="0"/>
           </a:p>
@@ -30424,7 +30402,7 @@
             </a:r>
             <a:r>
               <a:rPr lang="en-US" dirty="0" err="1"/>
-              <a:t>jbogard</a:t>
+              <a:t>jimmybogard.com</a:t>
             </a:r>
             <a:endParaRPr lang="en-US" dirty="0"/>
           </a:p>
@@ -30450,7 +30428,7 @@
       </p:sp>
       <p:pic>
         <p:nvPicPr>
-          <p:cNvPr id="9" name="Picture 4" descr="https://mvp.support.microsoft.com/library/images/support/en-US/MVPLogo.gif"/>
+          <p:cNvPr id="12" name="Picture 12" descr="AutoMapper"/>
           <p:cNvPicPr>
             <a:picLocks noChangeAspect="1" noChangeArrowheads="1"/>
           </p:cNvPicPr>
@@ -30471,8 +30449,8 @@
         </p:blipFill>
         <p:spPr bwMode="auto">
           <a:xfrm>
-            <a:off x="3230080" y="4637554"/>
-            <a:ext cx="1095375" cy="1714500"/>
+            <a:off x="5608299" y="4809973"/>
+            <a:ext cx="3733800" cy="382377"/>
           </a:xfrm>
           <a:prstGeom prst="rect">
             <a:avLst/>
@@ -30491,63 +30469,58 @@
       </p:pic>
       <p:pic>
         <p:nvPicPr>
-          <p:cNvPr id="12" name="Picture 12" descr="AutoMapper"/>
+          <p:cNvPr id="4" name="Picture 3"/>
           <p:cNvPicPr>
-            <a:picLocks noChangeAspect="1" noChangeArrowheads="1"/>
+            <a:picLocks noChangeAspect="1"/>
           </p:cNvPicPr>
           <p:nvPr/>
         </p:nvPicPr>
         <p:blipFill>
-          <a:blip r:embed="rId7">
-            <a:extLst>
-              <a:ext uri="{28A0092B-C50C-407E-A947-70E740481C1C}">
-                <a14:useLocalDpi xmlns:a14="http://schemas.microsoft.com/office/drawing/2010/main" val="0"/>
-              </a:ext>
-            </a:extLst>
-          </a:blip>
-          <a:srcRect/>
+          <a:blip r:embed="rId7"/>
           <a:stretch>
             <a:fillRect/>
           </a:stretch>
         </p:blipFill>
-        <p:spPr bwMode="auto">
-          <a:xfrm>
-            <a:off x="5608299" y="4809973"/>
-            <a:ext cx="3733800" cy="382377"/>
+        <p:spPr>
+          <a:xfrm>
+            <a:off x="6949172" y="5420546"/>
+            <a:ext cx="1052054" cy="1052054"/>
           </a:xfrm>
           <a:prstGeom prst="rect">
             <a:avLst/>
           </a:prstGeom>
-          <a:noFill/>
-          <a:extLst>
-            <a:ext uri="{909E8E84-426E-40DD-AFC4-6F175D3DCCD1}">
-              <a14:hiddenFill xmlns:a14="http://schemas.microsoft.com/office/drawing/2010/main">
-                <a:solidFill>
-                  <a:srgbClr val="FFFFFF"/>
-                </a:solidFill>
-              </a14:hiddenFill>
-            </a:ext>
-          </a:extLst>
         </p:spPr>
       </p:pic>
       <p:pic>
         <p:nvPicPr>
-          <p:cNvPr id="4" name="Picture 3"/>
+          <p:cNvPr id="5" name="Picture 4">
+            <a:extLst>
+              <a:ext uri="{FF2B5EF4-FFF2-40B4-BE49-F238E27FC236}">
+                <a16:creationId xmlns:a16="http://schemas.microsoft.com/office/drawing/2014/main" id="{EFB6326B-CDBF-0648-A746-949F7C216F00}"/>
+              </a:ext>
+            </a:extLst>
+          </p:cNvPr>
           <p:cNvPicPr>
             <a:picLocks noChangeAspect="1"/>
           </p:cNvPicPr>
           <p:nvPr/>
         </p:nvPicPr>
         <p:blipFill>
-          <a:blip r:embed="rId8"/>
+          <a:blip r:embed="rId8">
+            <a:extLst>
+              <a:ext uri="{28A0092B-C50C-407E-A947-70E740481C1C}">
+                <a14:useLocalDpi xmlns:a14="http://schemas.microsoft.com/office/drawing/2010/main" val="0"/>
+              </a:ext>
+            </a:extLst>
+          </a:blip>
           <a:stretch>
             <a:fillRect/>
           </a:stretch>
         </p:blipFill>
         <p:spPr>
           <a:xfrm>
-            <a:off x="6949172" y="5420546"/>
-            <a:ext cx="1052054" cy="1052054"/>
+            <a:off x="3271810" y="4908445"/>
+            <a:ext cx="914400" cy="1447800"/>
           </a:xfrm>
           <a:prstGeom prst="rect">
             <a:avLst/>

--- a/ModularizingTheMonolith/ModularizingTheMonolith.pptx
+++ b/ModularizingTheMonolith/ModularizingTheMonolith.pptx
@@ -294,7 +294,7 @@
           <a:p>
             <a:fld id="{D4DDA21E-28F9-429C-875C-CFE3ACB8D770}" type="datetimeFigureOut">
               <a:rPr lang="en-US" smtClean="0"/>
-              <a:t>8/15/25</a:t>
+              <a:t>10/14/25</a:t>
             </a:fld>
             <a:endParaRPr lang="en-US"/>
           </a:p>
@@ -1494,7 +1494,7 @@
           <a:p>
             <a:fld id="{EB044DB1-568E-4964-A02F-CCDCEAA70EF3}" type="datetimeFigureOut">
               <a:rPr lang="en-US" smtClean="0"/>
-              <a:t>8/15/25</a:t>
+              <a:t>10/14/25</a:t>
             </a:fld>
             <a:endParaRPr lang="en-US"/>
           </a:p>
@@ -1799,7 +1799,7 @@
           <a:p>
             <a:fld id="{EB044DB1-568E-4964-A02F-CCDCEAA70EF3}" type="datetimeFigureOut">
               <a:rPr lang="en-US" smtClean="0"/>
-              <a:t>8/15/25</a:t>
+              <a:t>10/14/25</a:t>
             </a:fld>
             <a:endParaRPr lang="en-US"/>
           </a:p>
@@ -1964,7 +1964,7 @@
           <a:p>
             <a:fld id="{EB044DB1-568E-4964-A02F-CCDCEAA70EF3}" type="datetimeFigureOut">
               <a:rPr lang="en-US" smtClean="0"/>
-              <a:t>8/15/25</a:t>
+              <a:t>10/14/25</a:t>
             </a:fld>
             <a:endParaRPr lang="en-US"/>
           </a:p>
@@ -2139,7 +2139,7 @@
           <a:p>
             <a:fld id="{EB044DB1-568E-4964-A02F-CCDCEAA70EF3}" type="datetimeFigureOut">
               <a:rPr lang="en-US" smtClean="0"/>
-              <a:t>8/15/25</a:t>
+              <a:t>10/14/25</a:t>
             </a:fld>
             <a:endParaRPr lang="en-US"/>
           </a:p>
@@ -3835,7 +3835,7 @@
           <a:p>
             <a:fld id="{EB044DB1-568E-4964-A02F-CCDCEAA70EF3}" type="datetimeFigureOut">
               <a:rPr lang="en-US" smtClean="0"/>
-              <a:t>8/15/25</a:t>
+              <a:t>10/14/25</a:t>
             </a:fld>
             <a:endParaRPr lang="en-US"/>
           </a:p>
@@ -4042,7 +4042,7 @@
           <a:p>
             <a:fld id="{EB044DB1-568E-4964-A02F-CCDCEAA70EF3}" type="datetimeFigureOut">
               <a:rPr lang="en-US" smtClean="0"/>
-              <a:t>8/15/25</a:t>
+              <a:t>10/14/25</a:t>
             </a:fld>
             <a:endParaRPr lang="en-US"/>
           </a:p>

--- a/ModularizingTheMonolith/ModularizingTheMonolith.pptx
+++ b/ModularizingTheMonolith/ModularizingTheMonolith.pptx
@@ -5,7 +5,7 @@
     <p:sldMasterId id="2147483700" r:id="rId1"/>
   </p:sldMasterIdLst>
   <p:notesMasterIdLst>
-    <p:notesMasterId r:id="rId75"/>
+    <p:notesMasterId r:id="rId76"/>
   </p:notesMasterIdLst>
   <p:sldIdLst>
     <p:sldId id="355" r:id="rId2"/>
@@ -80,7 +80,8 @@
     <p:sldId id="428" r:id="rId71"/>
     <p:sldId id="429" r:id="rId72"/>
     <p:sldId id="430" r:id="rId73"/>
-    <p:sldId id="356" r:id="rId74"/>
+    <p:sldId id="431" r:id="rId74"/>
+    <p:sldId id="356" r:id="rId75"/>
   </p:sldIdLst>
   <p:sldSz cx="12192000" cy="6858000"/>
   <p:notesSz cx="6858000" cy="9144000"/>
@@ -294,7 +295,7 @@
           <a:p>
             <a:fld id="{D4DDA21E-28F9-429C-875C-CFE3ACB8D770}" type="datetimeFigureOut">
               <a:rPr lang="en-US" smtClean="0"/>
-              <a:t>10/14/25</a:t>
+              <a:t>11/13/25</a:t>
             </a:fld>
             <a:endParaRPr lang="en-US"/>
           </a:p>
@@ -650,6 +651,95 @@
 </p:notes>
 </file>
 
+<file path=ppt/notesSlides/notesSlide10.xml><?xml version="1.0" encoding="utf-8"?>
+<p:notes xmlns:a="http://schemas.openxmlformats.org/drawingml/2006/main" xmlns:r="http://schemas.openxmlformats.org/officeDocument/2006/relationships" xmlns:p="http://schemas.openxmlformats.org/presentationml/2006/main">
+  <p:cSld>
+    <p:spTree>
+      <p:nvGrpSpPr>
+        <p:cNvPr id="1" name=""/>
+        <p:cNvGrpSpPr/>
+        <p:nvPr/>
+      </p:nvGrpSpPr>
+      <p:grpSpPr>
+        <a:xfrm>
+          <a:off x="0" y="0"/>
+          <a:ext cx="0" cy="0"/>
+          <a:chOff x="0" y="0"/>
+          <a:chExt cx="0" cy="0"/>
+        </a:xfrm>
+      </p:grpSpPr>
+      <p:sp>
+        <p:nvSpPr>
+          <p:cNvPr id="2" name="Slide Image Placeholder 1"/>
+          <p:cNvSpPr>
+            <a:spLocks noGrp="1" noRot="1" noChangeAspect="1"/>
+          </p:cNvSpPr>
+          <p:nvPr>
+            <p:ph type="sldImg"/>
+          </p:nvPr>
+        </p:nvSpPr>
+        <p:spPr>
+          <a:xfrm>
+            <a:off x="381000" y="685800"/>
+            <a:ext cx="6096000" cy="3429000"/>
+          </a:xfrm>
+        </p:spPr>
+      </p:sp>
+      <p:sp>
+        <p:nvSpPr>
+          <p:cNvPr id="3" name="Notes Placeholder 2"/>
+          <p:cNvSpPr>
+            <a:spLocks noGrp="1"/>
+          </p:cNvSpPr>
+          <p:nvPr>
+            <p:ph type="body" idx="1"/>
+          </p:nvPr>
+        </p:nvSpPr>
+        <p:spPr/>
+        <p:txBody>
+          <a:bodyPr/>
+          <a:lstStyle/>
+          <a:p>
+            <a:endParaRPr lang="en-US" dirty="0"/>
+          </a:p>
+        </p:txBody>
+      </p:sp>
+      <p:sp>
+        <p:nvSpPr>
+          <p:cNvPr id="4" name="Slide Number Placeholder 3"/>
+          <p:cNvSpPr>
+            <a:spLocks noGrp="1"/>
+          </p:cNvSpPr>
+          <p:nvPr>
+            <p:ph type="sldNum" sz="quarter" idx="10"/>
+          </p:nvPr>
+        </p:nvSpPr>
+        <p:spPr/>
+        <p:txBody>
+          <a:bodyPr/>
+          <a:lstStyle/>
+          <a:p>
+            <a:fld id="{DC42B9C4-3265-4C64-80EB-D0107FD08979}" type="slidenum">
+              <a:rPr lang="en-US" smtClean="0"/>
+              <a:t>74</a:t>
+            </a:fld>
+            <a:endParaRPr lang="en-US"/>
+          </a:p>
+        </p:txBody>
+      </p:sp>
+    </p:spTree>
+    <p:extLst>
+      <p:ext uri="{BB962C8B-B14F-4D97-AF65-F5344CB8AC3E}">
+        <p14:creationId xmlns:p14="http://schemas.microsoft.com/office/powerpoint/2010/main" val="3921396720"/>
+      </p:ext>
+    </p:extLst>
+  </p:cSld>
+  <p:clrMapOvr>
+    <a:masterClrMapping/>
+  </p:clrMapOvr>
+</p:notes>
+</file>
+
 <file path=ppt/notesSlides/notesSlide2.xml><?xml version="1.0" encoding="utf-8"?>
 <p:notes xmlns:a="http://schemas.openxmlformats.org/drawingml/2006/main" xmlns:r="http://schemas.openxmlformats.org/officeDocument/2006/relationships" xmlns:p="http://schemas.openxmlformats.org/presentationml/2006/main">
   <p:cSld>
@@ -1301,12 +1391,7 @@
             <p:ph type="sldImg"/>
           </p:nvPr>
         </p:nvSpPr>
-        <p:spPr>
-          <a:xfrm>
-            <a:off x="381000" y="685800"/>
-            <a:ext cx="6096000" cy="3429000"/>
-          </a:xfrm>
-        </p:spPr>
+        <p:spPr/>
       </p:sp>
       <p:sp>
         <p:nvSpPr>
@@ -1323,7 +1408,7 @@
           <a:bodyPr/>
           <a:lstStyle/>
           <a:p>
-            <a:endParaRPr lang="en-US" dirty="0"/>
+            <a:endParaRPr lang="en-US"/>
           </a:p>
         </p:txBody>
       </p:sp>
@@ -1334,7 +1419,7 @@
             <a:spLocks noGrp="1"/>
           </p:cNvSpPr>
           <p:nvPr>
-            <p:ph type="sldNum" sz="quarter" idx="10"/>
+            <p:ph type="sldNum" sz="quarter" idx="5"/>
           </p:nvPr>
         </p:nvSpPr>
         <p:spPr/>
@@ -1353,7 +1438,7 @@
     </p:spTree>
     <p:extLst>
       <p:ext uri="{BB962C8B-B14F-4D97-AF65-F5344CB8AC3E}">
-        <p14:creationId xmlns:p14="http://schemas.microsoft.com/office/powerpoint/2010/main" val="3921396720"/>
+        <p14:creationId xmlns:p14="http://schemas.microsoft.com/office/powerpoint/2010/main" val="1784510321"/>
       </p:ext>
     </p:extLst>
   </p:cSld>
@@ -1494,7 +1579,7 @@
           <a:p>
             <a:fld id="{EB044DB1-568E-4964-A02F-CCDCEAA70EF3}" type="datetimeFigureOut">
               <a:rPr lang="en-US" smtClean="0"/>
-              <a:t>10/14/25</a:t>
+              <a:t>11/13/25</a:t>
             </a:fld>
             <a:endParaRPr lang="en-US"/>
           </a:p>
@@ -1799,7 +1884,7 @@
           <a:p>
             <a:fld id="{EB044DB1-568E-4964-A02F-CCDCEAA70EF3}" type="datetimeFigureOut">
               <a:rPr lang="en-US" smtClean="0"/>
-              <a:t>10/14/25</a:t>
+              <a:t>11/13/25</a:t>
             </a:fld>
             <a:endParaRPr lang="en-US"/>
           </a:p>
@@ -1964,7 +2049,7 @@
           <a:p>
             <a:fld id="{EB044DB1-568E-4964-A02F-CCDCEAA70EF3}" type="datetimeFigureOut">
               <a:rPr lang="en-US" smtClean="0"/>
-              <a:t>10/14/25</a:t>
+              <a:t>11/13/25</a:t>
             </a:fld>
             <a:endParaRPr lang="en-US"/>
           </a:p>
@@ -2139,7 +2224,7 @@
           <a:p>
             <a:fld id="{EB044DB1-568E-4964-A02F-CCDCEAA70EF3}" type="datetimeFigureOut">
               <a:rPr lang="en-US" smtClean="0"/>
-              <a:t>10/14/25</a:t>
+              <a:t>11/13/25</a:t>
             </a:fld>
             <a:endParaRPr lang="en-US"/>
           </a:p>
@@ -3835,7 +3920,7 @@
           <a:p>
             <a:fld id="{EB044DB1-568E-4964-A02F-CCDCEAA70EF3}" type="datetimeFigureOut">
               <a:rPr lang="en-US" smtClean="0"/>
-              <a:t>10/14/25</a:t>
+              <a:t>11/13/25</a:t>
             </a:fld>
             <a:endParaRPr lang="en-US"/>
           </a:p>
@@ -4042,7 +4127,7 @@
           <a:p>
             <a:fld id="{EB044DB1-568E-4964-A02F-CCDCEAA70EF3}" type="datetimeFigureOut">
               <a:rPr lang="en-US" smtClean="0"/>
-              <a:t>10/14/25</a:t>
+              <a:t>11/13/25</a:t>
             </a:fld>
             <a:endParaRPr lang="en-US"/>
           </a:p>
@@ -30309,6 +30394,50 @@
 <file path=ppt/slides/slide73.xml><?xml version="1.0" encoding="utf-8"?>
 <p:sld xmlns:a="http://schemas.openxmlformats.org/drawingml/2006/main" xmlns:r="http://schemas.openxmlformats.org/officeDocument/2006/relationships" xmlns:p="http://schemas.openxmlformats.org/presentationml/2006/main">
   <p:cSld>
+    <p:bg>
+      <p:bgPr>
+        <a:blipFill dpi="0" rotWithShape="1">
+          <a:blip r:embed="rId3">
+            <a:lum/>
+          </a:blip>
+          <a:srcRect/>
+          <a:stretch>
+            <a:fillRect/>
+          </a:stretch>
+        </a:blipFill>
+        <a:effectLst/>
+      </p:bgPr>
+    </p:bg>
+    <p:spTree>
+      <p:nvGrpSpPr>
+        <p:cNvPr id="1" name=""/>
+        <p:cNvGrpSpPr/>
+        <p:nvPr/>
+      </p:nvGrpSpPr>
+      <p:grpSpPr>
+        <a:xfrm>
+          <a:off x="0" y="0"/>
+          <a:ext cx="0" cy="0"/>
+          <a:chOff x="0" y="0"/>
+          <a:chExt cx="0" cy="0"/>
+        </a:xfrm>
+      </p:grpSpPr>
+    </p:spTree>
+    <p:extLst>
+      <p:ext uri="{BB962C8B-B14F-4D97-AF65-F5344CB8AC3E}">
+        <p14:creationId xmlns:p14="http://schemas.microsoft.com/office/powerpoint/2010/main" val="1903555542"/>
+      </p:ext>
+    </p:extLst>
+  </p:cSld>
+  <p:clrMapOvr>
+    <a:masterClrMapping/>
+  </p:clrMapOvr>
+</p:sld>
+</file>
+
+<file path=ppt/slides/slide74.xml><?xml version="1.0" encoding="utf-8"?>
+<p:sld xmlns:a="http://schemas.openxmlformats.org/drawingml/2006/main" xmlns:r="http://schemas.openxmlformats.org/officeDocument/2006/relationships" xmlns:p="http://schemas.openxmlformats.org/presentationml/2006/main">
+  <p:cSld>
     <p:spTree>
       <p:nvGrpSpPr>
         <p:cNvPr id="1" name=""/>
